--- a/exports/pptx/lessons/senior-module-05-dot-addition/day-03-dot-method.pptx
+++ b/exports/pptx/lessons/senior-module-05-dot-addition/day-03-dot-method.pptx
@@ -14,9 +14,12 @@
     <p:sldId id="262" r:id="rId8"/>
     <p:sldId id="263" r:id="rId9"/>
     <p:sldId id="264" r:id="rId10"/>
+    <p:sldId id="265" r:id="rId11"/>
+    <p:sldId id="266" r:id="rId12"/>
+    <p:sldId id="267" r:id="rId13"/>
   </p:sldIdLst>
   <p:notesMasterIdLst>
-    <p:notesMasterId r:id="rId11"/>
+    <p:notesMasterId r:id="rId14"/>
   </p:notesMasterIdLst>
   <p:sldSz cx="9144000" cy="5143500"/>
   <p:notesSz cx="5143500" cy="9144000"/>
@@ -534,6 +537,270 @@
             <a:fld id="{F7021451-1387-4CA6-816F-3879F97B5CBC}" type="slidenum">
               <a:rPr lang="en-US"/>
               <a:t>1</a:t>
+            </a:fld>
+            <a:endParaRPr lang="en-US"/>
+          </a:p>
+        </p:txBody>
+      </p:sp>
+    </p:spTree>
+    <p:extLst>
+      <p:ext uri="{BB962C8B-B14F-4D97-AF65-F5344CB8AC3E}">
+        <p14:creationId xmlns:p14="http://schemas.microsoft.com/office/powerpoint/2010/main" val="1024086991"/>
+      </p:ext>
+    </p:extLst>
+  </p:cSld>
+  <p:clrMapOvr>
+    <a:masterClrMapping/>
+  </p:clrMapOvr>
+</p:notes>
+</file>
+
+<file path=ppt/notesSlides/notesSlide10.xml><?xml version="1.0" encoding="utf-8"?>
+<p:notes xmlns:a="http://schemas.openxmlformats.org/drawingml/2006/main" xmlns:r="http://schemas.openxmlformats.org/officeDocument/2006/relationships" xmlns:p="http://schemas.openxmlformats.org/presentationml/2006/main">
+  <p:cSld>
+    <p:spTree>
+      <p:nvGrpSpPr>
+        <p:cNvPr id="1" name=""/>
+        <p:cNvGrpSpPr/>
+        <p:nvPr/>
+      </p:nvGrpSpPr>
+      <p:grpSpPr>
+        <a:xfrm>
+          <a:off x="0" y="0"/>
+          <a:ext cx="0" cy="0"/>
+          <a:chOff x="0" y="0"/>
+          <a:chExt cx="0" cy="0"/>
+        </a:xfrm>
+      </p:grpSpPr>
+      <p:sp>
+        <p:nvSpPr>
+          <p:cNvPr id="2" name="Slide Image Placeholder 1"/>
+          <p:cNvSpPr>
+            <a:spLocks noGrp="1" noRot="1" noChangeAspect="1"/>
+          </p:cNvSpPr>
+          <p:nvPr>
+            <p:ph type="sldImg"/>
+          </p:nvPr>
+        </p:nvSpPr>
+        <p:spPr/>
+      </p:sp>
+      <p:sp>
+        <p:nvSpPr>
+          <p:cNvPr id="3" name="Notes Placeholder 2"/>
+          <p:cNvSpPr>
+            <a:spLocks noGrp="1"/>
+          </p:cNvSpPr>
+          <p:nvPr>
+            <p:ph type="body" idx="1"/>
+          </p:nvPr>
+        </p:nvSpPr>
+        <p:spPr/>
+        <p:txBody>
+          <a:bodyPr/>
+          <a:lstStyle/>
+          <a:p>
+            <a:r>
+              <a:rPr lang="en-US" dirty="0"/>
+              <a:t/>
+            </a:r>
+            <a:endParaRPr lang="en-US" dirty="0"/>
+          </a:p>
+        </p:txBody>
+      </p:sp>
+      <p:sp>
+        <p:nvSpPr>
+          <p:cNvPr id="4" name="Slide Number Placeholder 3"/>
+          <p:cNvSpPr>
+            <a:spLocks noGrp="1"/>
+          </p:cNvSpPr>
+          <p:nvPr>
+            <p:ph type="sldNum" sz="quarter" idx="10"/>
+          </p:nvPr>
+        </p:nvSpPr>
+        <p:spPr/>
+        <p:txBody>
+          <a:bodyPr/>
+          <a:lstStyle/>
+          <a:p>
+            <a:fld id="{F7021451-1387-4CA6-816F-3879F97B5CBC}" type="slidenum">
+              <a:rPr lang="en-US"/>
+              <a:t>10</a:t>
+            </a:fld>
+            <a:endParaRPr lang="en-US"/>
+          </a:p>
+        </p:txBody>
+      </p:sp>
+    </p:spTree>
+    <p:extLst>
+      <p:ext uri="{BB962C8B-B14F-4D97-AF65-F5344CB8AC3E}">
+        <p14:creationId xmlns:p14="http://schemas.microsoft.com/office/powerpoint/2010/main" val="1024086991"/>
+      </p:ext>
+    </p:extLst>
+  </p:cSld>
+  <p:clrMapOvr>
+    <a:masterClrMapping/>
+  </p:clrMapOvr>
+</p:notes>
+</file>
+
+<file path=ppt/notesSlides/notesSlide11.xml><?xml version="1.0" encoding="utf-8"?>
+<p:notes xmlns:a="http://schemas.openxmlformats.org/drawingml/2006/main" xmlns:r="http://schemas.openxmlformats.org/officeDocument/2006/relationships" xmlns:p="http://schemas.openxmlformats.org/presentationml/2006/main">
+  <p:cSld>
+    <p:spTree>
+      <p:nvGrpSpPr>
+        <p:cNvPr id="1" name=""/>
+        <p:cNvGrpSpPr/>
+        <p:nvPr/>
+      </p:nvGrpSpPr>
+      <p:grpSpPr>
+        <a:xfrm>
+          <a:off x="0" y="0"/>
+          <a:ext cx="0" cy="0"/>
+          <a:chOff x="0" y="0"/>
+          <a:chExt cx="0" cy="0"/>
+        </a:xfrm>
+      </p:grpSpPr>
+      <p:sp>
+        <p:nvSpPr>
+          <p:cNvPr id="2" name="Slide Image Placeholder 1"/>
+          <p:cNvSpPr>
+            <a:spLocks noGrp="1" noRot="1" noChangeAspect="1"/>
+          </p:cNvSpPr>
+          <p:nvPr>
+            <p:ph type="sldImg"/>
+          </p:nvPr>
+        </p:nvSpPr>
+        <p:spPr/>
+      </p:sp>
+      <p:sp>
+        <p:nvSpPr>
+          <p:cNvPr id="3" name="Notes Placeholder 2"/>
+          <p:cNvSpPr>
+            <a:spLocks noGrp="1"/>
+          </p:cNvSpPr>
+          <p:nvPr>
+            <p:ph type="body" idx="1"/>
+          </p:nvPr>
+        </p:nvSpPr>
+        <p:spPr/>
+        <p:txBody>
+          <a:bodyPr/>
+          <a:lstStyle/>
+          <a:p>
+            <a:r>
+              <a:rPr lang="en-US" dirty="0"/>
+              <a:t/>
+            </a:r>
+            <a:endParaRPr lang="en-US" dirty="0"/>
+          </a:p>
+        </p:txBody>
+      </p:sp>
+      <p:sp>
+        <p:nvSpPr>
+          <p:cNvPr id="4" name="Slide Number Placeholder 3"/>
+          <p:cNvSpPr>
+            <a:spLocks noGrp="1"/>
+          </p:cNvSpPr>
+          <p:nvPr>
+            <p:ph type="sldNum" sz="quarter" idx="10"/>
+          </p:nvPr>
+        </p:nvSpPr>
+        <p:spPr/>
+        <p:txBody>
+          <a:bodyPr/>
+          <a:lstStyle/>
+          <a:p>
+            <a:fld id="{F7021451-1387-4CA6-816F-3879F97B5CBC}" type="slidenum">
+              <a:rPr lang="en-US"/>
+              <a:t>11</a:t>
+            </a:fld>
+            <a:endParaRPr lang="en-US"/>
+          </a:p>
+        </p:txBody>
+      </p:sp>
+    </p:spTree>
+    <p:extLst>
+      <p:ext uri="{BB962C8B-B14F-4D97-AF65-F5344CB8AC3E}">
+        <p14:creationId xmlns:p14="http://schemas.microsoft.com/office/powerpoint/2010/main" val="1024086991"/>
+      </p:ext>
+    </p:extLst>
+  </p:cSld>
+  <p:clrMapOvr>
+    <a:masterClrMapping/>
+  </p:clrMapOvr>
+</p:notes>
+</file>
+
+<file path=ppt/notesSlides/notesSlide12.xml><?xml version="1.0" encoding="utf-8"?>
+<p:notes xmlns:a="http://schemas.openxmlformats.org/drawingml/2006/main" xmlns:r="http://schemas.openxmlformats.org/officeDocument/2006/relationships" xmlns:p="http://schemas.openxmlformats.org/presentationml/2006/main">
+  <p:cSld>
+    <p:spTree>
+      <p:nvGrpSpPr>
+        <p:cNvPr id="1" name=""/>
+        <p:cNvGrpSpPr/>
+        <p:nvPr/>
+      </p:nvGrpSpPr>
+      <p:grpSpPr>
+        <a:xfrm>
+          <a:off x="0" y="0"/>
+          <a:ext cx="0" cy="0"/>
+          <a:chOff x="0" y="0"/>
+          <a:chExt cx="0" cy="0"/>
+        </a:xfrm>
+      </p:grpSpPr>
+      <p:sp>
+        <p:nvSpPr>
+          <p:cNvPr id="2" name="Slide Image Placeholder 1"/>
+          <p:cNvSpPr>
+            <a:spLocks noGrp="1" noRot="1" noChangeAspect="1"/>
+          </p:cNvSpPr>
+          <p:nvPr>
+            <p:ph type="sldImg"/>
+          </p:nvPr>
+        </p:nvSpPr>
+        <p:spPr/>
+      </p:sp>
+      <p:sp>
+        <p:nvSpPr>
+          <p:cNvPr id="3" name="Notes Placeholder 2"/>
+          <p:cNvSpPr>
+            <a:spLocks noGrp="1"/>
+          </p:cNvSpPr>
+          <p:nvPr>
+            <p:ph type="body" idx="1"/>
+          </p:nvPr>
+        </p:nvSpPr>
+        <p:spPr/>
+        <p:txBody>
+          <a:bodyPr/>
+          <a:lstStyle/>
+          <a:p>
+            <a:r>
+              <a:rPr lang="en-US" dirty="0"/>
+              <a:t/>
+            </a:r>
+            <a:endParaRPr lang="en-US" dirty="0"/>
+          </a:p>
+        </p:txBody>
+      </p:sp>
+      <p:sp>
+        <p:nvSpPr>
+          <p:cNvPr id="4" name="Slide Number Placeholder 3"/>
+          <p:cNvSpPr>
+            <a:spLocks noGrp="1"/>
+          </p:cNvSpPr>
+          <p:nvPr>
+            <p:ph type="sldNum" sz="quarter" idx="10"/>
+          </p:nvPr>
+        </p:nvSpPr>
+        <p:spPr/>
+        <p:txBody>
+          <a:bodyPr/>
+          <a:lstStyle/>
+          <a:p>
+            <a:fld id="{F7021451-1387-4CA6-816F-3879F97B5CBC}" type="slidenum">
+              <a:rPr lang="en-US"/>
+              <a:t>12</a:t>
             </a:fld>
             <a:endParaRPr lang="en-US"/>
           </a:p>
@@ -1787,7 +2054,117 @@
         </p:nvSpPr>
         <p:spPr>
           <a:xfrm>
-            <a:off x="406301" y="1223963"/>
+            <a:off x="406301" y="4434929"/>
+            <a:ext cx="8498026" cy="213271"/>
+          </a:xfrm>
+          <a:prstGeom prst="rect">
+            <a:avLst/>
+          </a:prstGeom>
+          <a:noFill/>
+          <a:ln/>
+        </p:spPr>
+        <p:txBody>
+          <a:bodyPr wrap="square" lIns="0" tIns="0" rIns="0" bIns="0" rtlCol="0" anchor="t"/>
+          <a:lstStyle/>
+          <a:p>
+            <a:pPr algn="l" indent="0" marL="0">
+              <a:lnSpc>
+                <a:spcPts val="1680"/>
+              </a:lnSpc>
+              <a:spcBef>
+                <a:spcPts val="300"/>
+              </a:spcBef>
+              <a:spcAft>
+                <a:spcPts val="300"/>
+              </a:spcAft>
+              <a:buNone/>
+            </a:pPr>
+            <a:r>
+              <a:rPr lang="en-US" sz="1200" dirty="0">
+                <a:solidFill>
+                  <a:srgbClr val="1A1A1A"/>
+                </a:solidFill>
+                <a:latin typeface="Georgia" pitchFamily="34" charset="0"/>
+                <a:ea typeface="Georgia" pitchFamily="34" charset="-122"/>
+                <a:cs typeface="Georgia" pitchFamily="34" charset="-120"/>
+              </a:rPr>
+              <a:t>Senior ·  · IKS Curriculum</a:t>
+            </a:r>
+            <a:endParaRPr lang="en-US" sz="1200" dirty="0"/>
+          </a:p>
+        </p:txBody>
+      </p:sp>
+    </p:spTree>
+  </p:cSld>
+  <p:clrMapOvr>
+    <a:masterClrMapping/>
+  </p:clrMapOvr>
+</p:sld>
+</file>
+
+<file path=ppt/slides/slide10.xml><?xml version="1.0" encoding="utf-8"?>
+<p:sld xmlns:a="http://schemas.openxmlformats.org/drawingml/2006/main" xmlns:r="http://schemas.openxmlformats.org/officeDocument/2006/relationships" xmlns:p="http://schemas.openxmlformats.org/presentationml/2006/main">
+  <p:cSld name="Slide 10">
+    <p:bg>
+      <p:bgPr>
+        <a:solidFill>
+          <a:srgbClr val="FAF7F2"/>
+        </a:solidFill>
+      </p:bgPr>
+    </p:bg>
+    <p:spTree>
+      <p:nvGrpSpPr>
+        <p:cNvPr id="1" name=""/>
+        <p:cNvGrpSpPr/>
+        <p:nvPr/>
+      </p:nvGrpSpPr>
+      <p:grpSpPr>
+        <a:xfrm>
+          <a:off x="0" y="0"/>
+          <a:ext cx="0" cy="0"/>
+          <a:chOff x="0" y="0"/>
+          <a:chExt cx="0" cy="0"/>
+        </a:xfrm>
+      </p:grpSpPr>
+      <p:sp>
+        <p:nvSpPr>
+          <p:cNvPr id="2" name="Text 0"/>
+          <p:cNvSpPr/>
+          <p:nvPr/>
+        </p:nvSpPr>
+        <p:spPr>
+          <a:xfrm>
+            <a:off x="0" y="0"/>
+            <a:ext cx="9144000" cy="101501"/>
+          </a:xfrm>
+          <a:prstGeom prst="rect">
+            <a:avLst/>
+          </a:prstGeom>
+          <a:solidFill>
+            <a:srgbClr val="5D1D2E"/>
+          </a:solidFill>
+          <a:ln/>
+        </p:spPr>
+        <p:txBody>
+          <a:bodyPr wrap="square" rtlCol="0" anchor="ctr"/>
+          <a:lstStyle/>
+          <a:p>
+            <a:pPr indent="0" marL="0">
+              <a:buNone/>
+            </a:pPr>
+            <a:endParaRPr lang="en-US" dirty="0"/>
+          </a:p>
+        </p:txBody>
+      </p:sp>
+      <p:sp>
+        <p:nvSpPr>
+          <p:cNvPr id="3" name="Text 1"/>
+          <p:cNvSpPr/>
+          <p:nvPr/>
+        </p:nvSpPr>
+        <p:spPr>
+          <a:xfrm>
+            <a:off x="406301" y="457051"/>
             <a:ext cx="8498026" cy="274290"/>
           </a:xfrm>
           <a:prstGeom prst="rect">
@@ -1821,7 +2198,7 @@
                 <a:ea typeface="Times New Roman" pitchFamily="34" charset="-122"/>
                 <a:cs typeface="Times New Roman" pitchFamily="34" charset="-120"/>
               </a:rPr>
-              <a:t>Learning objective</a:t>
+              <a:t>Differentiation</a:t>
             </a:r>
             <a:endParaRPr lang="en-US" sz="1800" dirty="0"/>
           </a:p>
@@ -1829,14 +2206,14 @@
       </p:sp>
       <p:sp>
         <p:nvSpPr>
-          <p:cNvPr id="6" name="Text 4"/>
+          <p:cNvPr id="4" name="Text 2"/>
           <p:cNvSpPr/>
           <p:nvPr/>
         </p:nvSpPr>
         <p:spPr>
           <a:xfrm>
-            <a:off x="406301" y="1637854"/>
-            <a:ext cx="8498026" cy="213271"/>
+            <a:off x="634901" y="883593"/>
+            <a:ext cx="8102798" cy="525661"/>
           </a:xfrm>
           <a:prstGeom prst="rect">
             <a:avLst/>
@@ -1848,20 +2225,18 @@
           <a:bodyPr wrap="square" lIns="0" tIns="0" rIns="0" bIns="0" rtlCol="0" anchor="t"/>
           <a:lstStyle/>
           <a:p>
-            <a:pPr algn="l" indent="0" marL="0">
-              <a:lnSpc>
-                <a:spcPts val="1680"/>
-              </a:lnSpc>
-              <a:spcBef>
-                <a:spcPts val="300"/>
-              </a:spcBef>
-              <a:spcAft>
-                <a:spcPts val="300"/>
-              </a:spcAft>
-              <a:buNone/>
-            </a:pPr>
-            <a:r>
-              <a:rPr lang="en-US" sz="1200" dirty="0">
+            <a:pPr algn="l" marL="342900" indent="-342900">
+              <a:lnSpc>
+                <a:spcPts val="1620"/>
+              </a:lnSpc>
+              <a:spcAft>
+                <a:spcPts val="300"/>
+              </a:spcAft>
+              <a:buSzPct val="100000"/>
+              <a:buChar char="•"/>
+            </a:pPr>
+            <a:r>
+              <a:rPr lang="en-US" sz="1200" b="1" dirty="0">
                 <a:solidFill>
                   <a:srgbClr val="1A1A1A"/>
                 </a:solidFill>
@@ -1869,15 +2244,507 @@
                 <a:ea typeface="Georgia" pitchFamily="34" charset="-122"/>
                 <a:cs typeface="Georgia" pitchFamily="34" charset="-120"/>
               </a:rPr>
-              <a:t>Students perform the dot method on 5-addend × 5-digit sums in under 90 seconds.</a:t>
+              <a:t>Tier up:</a:t>
+            </a:r>
+            <a:pPr algn="l" indent="0" marL="0">
+              <a:lnSpc>
+                <a:spcPts val="1620"/>
+              </a:lnSpc>
+              <a:spcAft>
+                <a:spcPts val="300"/>
+              </a:spcAft>
+              <a:buNone/>
+            </a:pPr>
+            <a:r>
+              <a:rPr lang="en-US" sz="1200" dirty="0">
+                <a:solidFill>
+                  <a:srgbClr val="1A1A1A"/>
+                </a:solidFill>
+                <a:latin typeface="Georgia" pitchFamily="34" charset="0"/>
+                <a:ea typeface="Georgia" pitchFamily="34" charset="-122"/>
+                <a:cs typeface="Georgia" pitchFamily="34" charset="-120"/>
+              </a:rPr>
+              <a:t> Try 6-addend × 6-digit. Time-target: under 120 sec.</a:t>
             </a:r>
             <a:endParaRPr lang="en-US" sz="1200" dirty="0"/>
           </a:p>
-        </p:txBody>
-      </p:sp>
-      <p:sp>
-        <p:nvSpPr>
-          <p:cNvPr id="7" name="Text 5"/>
+          <a:p>
+            <a:pPr algn="l" marL="342900" indent="-342900">
+              <a:lnSpc>
+                <a:spcPts val="1620"/>
+              </a:lnSpc>
+              <a:spcAft>
+                <a:spcPts val="300"/>
+              </a:spcAft>
+              <a:buSzPct val="100000"/>
+              <a:buChar char="•"/>
+            </a:pPr>
+            <a:r>
+              <a:rPr lang="en-US" sz="1200" b="1" dirty="0">
+                <a:solidFill>
+                  <a:srgbClr val="1A1A1A"/>
+                </a:solidFill>
+                <a:latin typeface="Georgia" pitchFamily="34" charset="0"/>
+                <a:ea typeface="Georgia" pitchFamily="34" charset="-122"/>
+                <a:cs typeface="Georgia" pitchFamily="34" charset="-120"/>
+              </a:rPr>
+              <a:t>Tier down:</a:t>
+            </a:r>
+            <a:pPr algn="l" indent="0" marL="0">
+              <a:lnSpc>
+                <a:spcPts val="1620"/>
+              </a:lnSpc>
+              <a:spcAft>
+                <a:spcPts val="300"/>
+              </a:spcAft>
+              <a:buNone/>
+            </a:pPr>
+            <a:r>
+              <a:rPr lang="en-US" sz="1200" dirty="0">
+                <a:solidFill>
+                  <a:srgbClr val="1A1A1A"/>
+                </a:solidFill>
+                <a:latin typeface="Georgia" pitchFamily="34" charset="0"/>
+                <a:ea typeface="Georgia" pitchFamily="34" charset="-122"/>
+                <a:cs typeface="Georgia" pitchFamily="34" charset="-120"/>
+              </a:rPr>
+              <a:t> Stay at Round 2 level until comfortable.</a:t>
+            </a:r>
+            <a:endParaRPr lang="en-US" sz="1200" dirty="0"/>
+          </a:p>
+        </p:txBody>
+      </p:sp>
+      <p:sp>
+        <p:nvSpPr>
+          <p:cNvPr id="5" name="Text 3"/>
+          <p:cNvSpPr/>
+          <p:nvPr/>
+        </p:nvSpPr>
+        <p:spPr>
+          <a:xfrm>
+            <a:off x="406301" y="4434929"/>
+            <a:ext cx="8498026" cy="213271"/>
+          </a:xfrm>
+          <a:prstGeom prst="rect">
+            <a:avLst/>
+          </a:prstGeom>
+          <a:noFill/>
+          <a:ln/>
+        </p:spPr>
+        <p:txBody>
+          <a:bodyPr wrap="square" lIns="0" tIns="0" rIns="0" bIns="0" rtlCol="0" anchor="t"/>
+          <a:lstStyle/>
+          <a:p>
+            <a:pPr algn="l" indent="0" marL="0">
+              <a:lnSpc>
+                <a:spcPts val="1680"/>
+              </a:lnSpc>
+              <a:spcBef>
+                <a:spcPts val="300"/>
+              </a:spcBef>
+              <a:spcAft>
+                <a:spcPts val="300"/>
+              </a:spcAft>
+              <a:buNone/>
+            </a:pPr>
+            <a:r>
+              <a:rPr lang="en-US" sz="1200" dirty="0">
+                <a:solidFill>
+                  <a:srgbClr val="1A1A1A"/>
+                </a:solidFill>
+                <a:latin typeface="Georgia" pitchFamily="34" charset="0"/>
+                <a:ea typeface="Georgia" pitchFamily="34" charset="-122"/>
+                <a:cs typeface="Georgia" pitchFamily="34" charset="-120"/>
+              </a:rPr>
+              <a:t>Senior ·  · IKS Curriculum</a:t>
+            </a:r>
+            <a:endParaRPr lang="en-US" sz="1200" dirty="0"/>
+          </a:p>
+        </p:txBody>
+      </p:sp>
+    </p:spTree>
+  </p:cSld>
+  <p:clrMapOvr>
+    <a:masterClrMapping/>
+  </p:clrMapOvr>
+</p:sld>
+</file>
+
+<file path=ppt/slides/slide11.xml><?xml version="1.0" encoding="utf-8"?>
+<p:sld xmlns:a="http://schemas.openxmlformats.org/drawingml/2006/main" xmlns:r="http://schemas.openxmlformats.org/officeDocument/2006/relationships" xmlns:p="http://schemas.openxmlformats.org/presentationml/2006/main">
+  <p:cSld name="Slide 11">
+    <p:bg>
+      <p:bgPr>
+        <a:solidFill>
+          <a:srgbClr val="FAF7F2"/>
+        </a:solidFill>
+      </p:bgPr>
+    </p:bg>
+    <p:spTree>
+      <p:nvGrpSpPr>
+        <p:cNvPr id="1" name=""/>
+        <p:cNvGrpSpPr/>
+        <p:nvPr/>
+      </p:nvGrpSpPr>
+      <p:grpSpPr>
+        <a:xfrm>
+          <a:off x="0" y="0"/>
+          <a:ext cx="0" cy="0"/>
+          <a:chOff x="0" y="0"/>
+          <a:chExt cx="0" cy="0"/>
+        </a:xfrm>
+      </p:grpSpPr>
+      <p:sp>
+        <p:nvSpPr>
+          <p:cNvPr id="2" name="Text 0"/>
+          <p:cNvSpPr/>
+          <p:nvPr/>
+        </p:nvSpPr>
+        <p:spPr>
+          <a:xfrm>
+            <a:off x="0" y="0"/>
+            <a:ext cx="9144000" cy="101501"/>
+          </a:xfrm>
+          <a:prstGeom prst="rect">
+            <a:avLst/>
+          </a:prstGeom>
+          <a:solidFill>
+            <a:srgbClr val="5D1D2E"/>
+          </a:solidFill>
+          <a:ln/>
+        </p:spPr>
+        <p:txBody>
+          <a:bodyPr wrap="square" rtlCol="0" anchor="ctr"/>
+          <a:lstStyle/>
+          <a:p>
+            <a:pPr indent="0" marL="0">
+              <a:buNone/>
+            </a:pPr>
+            <a:endParaRPr lang="en-US" dirty="0"/>
+          </a:p>
+        </p:txBody>
+      </p:sp>
+      <p:sp>
+        <p:nvSpPr>
+          <p:cNvPr id="3" name="Text 1"/>
+          <p:cNvSpPr/>
+          <p:nvPr/>
+        </p:nvSpPr>
+        <p:spPr>
+          <a:xfrm>
+            <a:off x="406301" y="457051"/>
+            <a:ext cx="8498026" cy="274290"/>
+          </a:xfrm>
+          <a:prstGeom prst="rect">
+            <a:avLst/>
+          </a:prstGeom>
+          <a:noFill/>
+          <a:ln/>
+        </p:spPr>
+        <p:txBody>
+          <a:bodyPr wrap="square" lIns="0" tIns="0" rIns="0" bIns="0" rtlCol="0" anchor="t"/>
+          <a:lstStyle/>
+          <a:p>
+            <a:pPr algn="l" indent="0" marL="0">
+              <a:lnSpc>
+                <a:spcPts val="2160"/>
+              </a:lnSpc>
+              <a:spcBef>
+                <a:spcPts val="600"/>
+              </a:spcBef>
+              <a:spcAft>
+                <a:spcPts val="800"/>
+              </a:spcAft>
+              <a:buNone/>
+            </a:pPr>
+            <a:r>
+              <a:rPr lang="en-US" sz="1800" b="1" dirty="0">
+                <a:solidFill>
+                  <a:srgbClr val="997929"/>
+                </a:solidFill>
+                <a:latin typeface="Times New Roman" pitchFamily="34" charset="0"/>
+                <a:ea typeface="Times New Roman" pitchFamily="34" charset="-122"/>
+                <a:cs typeface="Times New Roman" pitchFamily="34" charset="-120"/>
+              </a:rPr>
+              <a:t>Teacher notes</a:t>
+            </a:r>
+            <a:endParaRPr lang="en-US" sz="1800" dirty="0"/>
+          </a:p>
+        </p:txBody>
+      </p:sp>
+      <p:sp>
+        <p:nvSpPr>
+          <p:cNvPr id="4" name="Text 2"/>
+          <p:cNvSpPr/>
+          <p:nvPr/>
+        </p:nvSpPr>
+        <p:spPr>
+          <a:xfrm>
+            <a:off x="634901" y="883593"/>
+            <a:ext cx="8102798" cy="487561"/>
+          </a:xfrm>
+          <a:prstGeom prst="rect">
+            <a:avLst/>
+          </a:prstGeom>
+          <a:noFill/>
+          <a:ln/>
+        </p:spPr>
+        <p:txBody>
+          <a:bodyPr wrap="square" lIns="0" tIns="0" rIns="0" bIns="0" rtlCol="0" anchor="t"/>
+          <a:lstStyle/>
+          <a:p>
+            <a:pPr algn="l" marL="342900" indent="-342900">
+              <a:lnSpc>
+                <a:spcPts val="1620"/>
+              </a:lnSpc>
+              <a:spcAft>
+                <a:spcPts val="300"/>
+              </a:spcAft>
+              <a:buSzPct val="100000"/>
+              <a:buChar char="•"/>
+            </a:pPr>
+            <a:r>
+              <a:rPr lang="en-US" sz="1200" dirty="0">
+                <a:solidFill>
+                  <a:srgbClr val="1A1A1A"/>
+                </a:solidFill>
+                <a:latin typeface="Georgia" pitchFamily="34" charset="0"/>
+                <a:ea typeface="Georgia" pitchFamily="34" charset="-122"/>
+                <a:cs typeface="Georgia" pitchFamily="34" charset="-120"/>
+              </a:rPr>
+              <a:t>The "eye scan pattern" is the speed multiplier. Most students serial-scan. Teach the jump-pattern: see one completion, mark it, scan rest of column for the NEXT one without restarting.</a:t>
+            </a:r>
+            <a:endParaRPr lang="en-US" sz="1200" dirty="0"/>
+          </a:p>
+        </p:txBody>
+      </p:sp>
+      <p:sp>
+        <p:nvSpPr>
+          <p:cNvPr id="5" name="Text 3"/>
+          <p:cNvSpPr/>
+          <p:nvPr/>
+        </p:nvSpPr>
+        <p:spPr>
+          <a:xfrm>
+            <a:off x="406301" y="4434929"/>
+            <a:ext cx="8498026" cy="213271"/>
+          </a:xfrm>
+          <a:prstGeom prst="rect">
+            <a:avLst/>
+          </a:prstGeom>
+          <a:noFill/>
+          <a:ln/>
+        </p:spPr>
+        <p:txBody>
+          <a:bodyPr wrap="square" lIns="0" tIns="0" rIns="0" bIns="0" rtlCol="0" anchor="t"/>
+          <a:lstStyle/>
+          <a:p>
+            <a:pPr algn="l" indent="0" marL="0">
+              <a:lnSpc>
+                <a:spcPts val="1680"/>
+              </a:lnSpc>
+              <a:spcBef>
+                <a:spcPts val="300"/>
+              </a:spcBef>
+              <a:spcAft>
+                <a:spcPts val="300"/>
+              </a:spcAft>
+              <a:buNone/>
+            </a:pPr>
+            <a:r>
+              <a:rPr lang="en-US" sz="1200" dirty="0">
+                <a:solidFill>
+                  <a:srgbClr val="1A1A1A"/>
+                </a:solidFill>
+                <a:latin typeface="Georgia" pitchFamily="34" charset="0"/>
+                <a:ea typeface="Georgia" pitchFamily="34" charset="-122"/>
+                <a:cs typeface="Georgia" pitchFamily="34" charset="-120"/>
+              </a:rPr>
+              <a:t>Senior ·  · IKS Curriculum</a:t>
+            </a:r>
+            <a:endParaRPr lang="en-US" sz="1200" dirty="0"/>
+          </a:p>
+        </p:txBody>
+      </p:sp>
+    </p:spTree>
+  </p:cSld>
+  <p:clrMapOvr>
+    <a:masterClrMapping/>
+  </p:clrMapOvr>
+</p:sld>
+</file>
+
+<file path=ppt/slides/slide12.xml><?xml version="1.0" encoding="utf-8"?>
+<p:sld xmlns:a="http://schemas.openxmlformats.org/drawingml/2006/main" xmlns:r="http://schemas.openxmlformats.org/officeDocument/2006/relationships" xmlns:p="http://schemas.openxmlformats.org/presentationml/2006/main">
+  <p:cSld name="Slide 12">
+    <p:bg>
+      <p:bgPr>
+        <a:solidFill>
+          <a:srgbClr val="FAF7F2"/>
+        </a:solidFill>
+      </p:bgPr>
+    </p:bg>
+    <p:spTree>
+      <p:nvGrpSpPr>
+        <p:cNvPr id="1" name=""/>
+        <p:cNvGrpSpPr/>
+        <p:nvPr/>
+      </p:nvGrpSpPr>
+      <p:grpSpPr>
+        <a:xfrm>
+          <a:off x="0" y="0"/>
+          <a:ext cx="0" cy="0"/>
+          <a:chOff x="0" y="0"/>
+          <a:chExt cx="0" cy="0"/>
+        </a:xfrm>
+      </p:grpSpPr>
+      <p:sp>
+        <p:nvSpPr>
+          <p:cNvPr id="2" name="Text 0"/>
+          <p:cNvSpPr/>
+          <p:nvPr/>
+        </p:nvSpPr>
+        <p:spPr>
+          <a:xfrm>
+            <a:off x="0" y="0"/>
+            <a:ext cx="9144000" cy="101501"/>
+          </a:xfrm>
+          <a:prstGeom prst="rect">
+            <a:avLst/>
+          </a:prstGeom>
+          <a:solidFill>
+            <a:srgbClr val="5D1D2E"/>
+          </a:solidFill>
+          <a:ln/>
+        </p:spPr>
+        <p:txBody>
+          <a:bodyPr wrap="square" rtlCol="0" anchor="ctr"/>
+          <a:lstStyle/>
+          <a:p>
+            <a:pPr indent="0" marL="0">
+              <a:buNone/>
+            </a:pPr>
+            <a:endParaRPr lang="en-US" dirty="0"/>
+          </a:p>
+        </p:txBody>
+      </p:sp>
+      <p:sp>
+        <p:nvSpPr>
+          <p:cNvPr id="3" name="Text 1"/>
+          <p:cNvSpPr/>
+          <p:nvPr/>
+        </p:nvSpPr>
+        <p:spPr>
+          <a:xfrm>
+            <a:off x="406301" y="457051"/>
+            <a:ext cx="8498026" cy="274290"/>
+          </a:xfrm>
+          <a:prstGeom prst="rect">
+            <a:avLst/>
+          </a:prstGeom>
+          <a:noFill/>
+          <a:ln/>
+        </p:spPr>
+        <p:txBody>
+          <a:bodyPr wrap="square" lIns="0" tIns="0" rIns="0" bIns="0" rtlCol="0" anchor="t"/>
+          <a:lstStyle/>
+          <a:p>
+            <a:pPr algn="l" indent="0" marL="0">
+              <a:lnSpc>
+                <a:spcPts val="2160"/>
+              </a:lnSpc>
+              <a:spcBef>
+                <a:spcPts val="600"/>
+              </a:spcBef>
+              <a:spcAft>
+                <a:spcPts val="800"/>
+              </a:spcAft>
+              <a:buNone/>
+            </a:pPr>
+            <a:r>
+              <a:rPr lang="en-US" sz="1800" b="1" dirty="0">
+                <a:solidFill>
+                  <a:srgbClr val="997929"/>
+                </a:solidFill>
+                <a:latin typeface="Times New Roman" pitchFamily="34" charset="0"/>
+                <a:ea typeface="Times New Roman" pitchFamily="34" charset="-122"/>
+                <a:cs typeface="Times New Roman" pitchFamily="34" charset="-120"/>
+              </a:rPr>
+              <a:t>Citation(s) used</a:t>
+            </a:r>
+            <a:endParaRPr lang="en-US" sz="1800" dirty="0"/>
+          </a:p>
+        </p:txBody>
+      </p:sp>
+      <p:sp>
+        <p:nvSpPr>
+          <p:cNvPr id="4" name="Text 2"/>
+          <p:cNvSpPr/>
+          <p:nvPr/>
+        </p:nvSpPr>
+        <p:spPr>
+          <a:xfrm>
+            <a:off x="634901" y="883593"/>
+            <a:ext cx="8102798" cy="281880"/>
+          </a:xfrm>
+          <a:prstGeom prst="rect">
+            <a:avLst/>
+          </a:prstGeom>
+          <a:noFill/>
+          <a:ln/>
+        </p:spPr>
+        <p:txBody>
+          <a:bodyPr wrap="square" lIns="0" tIns="0" rIns="0" bIns="0" rtlCol="0" anchor="t"/>
+          <a:lstStyle/>
+          <a:p>
+            <a:pPr algn="l" marL="342900" indent="-342900">
+              <a:lnSpc>
+                <a:spcPts val="1620"/>
+              </a:lnSpc>
+              <a:spcAft>
+                <a:spcPts val="300"/>
+              </a:spcAft>
+              <a:buSzPct val="100000"/>
+              <a:buChar char="•"/>
+            </a:pPr>
+            <a:r>
+              <a:rPr lang="en-US" sz="1200" i="1" dirty="0">
+                <a:solidFill>
+                  <a:srgbClr val="1A1A1A"/>
+                </a:solidFill>
+                <a:latin typeface="Georgia" pitchFamily="34" charset="0"/>
+                <a:ea typeface="Georgia" pitchFamily="34" charset="-122"/>
+                <a:cs typeface="Georgia" pitchFamily="34" charset="-120"/>
+              </a:rPr>
+              <a:t>Vedic Mathematics Batch1.pdf</a:t>
+            </a:r>
+            <a:pPr algn="l" indent="0" marL="0">
+              <a:lnSpc>
+                <a:spcPts val="1620"/>
+              </a:lnSpc>
+              <a:spcAft>
+                <a:spcPts val="300"/>
+              </a:spcAft>
+              <a:buNone/>
+            </a:pPr>
+            <a:r>
+              <a:rPr lang="en-US" sz="1200" dirty="0">
+                <a:solidFill>
+                  <a:srgbClr val="1A1A1A"/>
+                </a:solidFill>
+                <a:latin typeface="Georgia" pitchFamily="34" charset="0"/>
+                <a:ea typeface="Georgia" pitchFamily="34" charset="-122"/>
+                <a:cs typeface="Georgia" pitchFamily="34" charset="-120"/>
+              </a:rPr>
+              <a:t>, §5.4.</a:t>
+            </a:r>
+            <a:endParaRPr lang="en-US" sz="1200" dirty="0"/>
+          </a:p>
+        </p:txBody>
+      </p:sp>
+      <p:sp>
+        <p:nvSpPr>
+          <p:cNvPr id="5" name="Text 3"/>
           <p:cNvSpPr/>
           <p:nvPr/>
         </p:nvSpPr>
@@ -2027,7 +2894,7 @@
                 <a:ea typeface="Times New Roman" pitchFamily="34" charset="-122"/>
                 <a:cs typeface="Times New Roman" pitchFamily="34" charset="-120"/>
               </a:rPr>
-              <a:t>Materials</a:t>
+              <a:t>Learning objective</a:t>
             </a:r>
             <a:endParaRPr lang="en-US" sz="1800" dirty="0"/>
           </a:p>
@@ -2075,7 +2942,7 @@
                 <a:ea typeface="Georgia" pitchFamily="34" charset="-122"/>
                 <a:cs typeface="Georgia" pitchFamily="34" charset="-120"/>
               </a:rPr>
-              <a:t>– Practice sheets (3 levels: warm-up 3×3, target 4×4, stretch 5×5) – Stopwatch – Whiteboard</a:t>
+              <a:t>Students perform the dot method on 5-addend × 5-digit sums in under 90 seconds.</a:t>
             </a:r>
             <a:endParaRPr lang="en-US" sz="1200" dirty="0"/>
           </a:p>
@@ -2233,7 +3100,7 @@
                 <a:ea typeface="Times New Roman" pitchFamily="34" charset="-122"/>
                 <a:cs typeface="Times New Roman" pitchFamily="34" charset="-120"/>
               </a:rPr>
-              <a:t>Flow</a:t>
+              <a:t>Materials</a:t>
             </a:r>
             <a:endParaRPr lang="en-US" sz="1800" dirty="0"/>
           </a:p>
@@ -2242,6 +3109,100 @@
       <p:sp>
         <p:nvSpPr>
           <p:cNvPr id="4" name="Text 2"/>
+          <p:cNvSpPr/>
+          <p:nvPr/>
+        </p:nvSpPr>
+        <p:spPr>
+          <a:xfrm>
+            <a:off x="634901" y="883593"/>
+            <a:ext cx="8102798" cy="769441"/>
+          </a:xfrm>
+          <a:prstGeom prst="rect">
+            <a:avLst/>
+          </a:prstGeom>
+          <a:noFill/>
+          <a:ln/>
+        </p:spPr>
+        <p:txBody>
+          <a:bodyPr wrap="square" lIns="0" tIns="0" rIns="0" bIns="0" rtlCol="0" anchor="t"/>
+          <a:lstStyle/>
+          <a:p>
+            <a:pPr algn="l" marL="342900" indent="-342900">
+              <a:lnSpc>
+                <a:spcPts val="1620"/>
+              </a:lnSpc>
+              <a:spcAft>
+                <a:spcPts val="300"/>
+              </a:spcAft>
+              <a:buSzPct val="100000"/>
+              <a:buChar char="•"/>
+            </a:pPr>
+            <a:r>
+              <a:rPr lang="en-US" sz="1200" dirty="0">
+                <a:solidFill>
+                  <a:srgbClr val="1A1A1A"/>
+                </a:solidFill>
+                <a:latin typeface="Georgia" pitchFamily="34" charset="0"/>
+                <a:ea typeface="Georgia" pitchFamily="34" charset="-122"/>
+                <a:cs typeface="Georgia" pitchFamily="34" charset="-120"/>
+              </a:rPr>
+              <a:t>Practice sheets (3 levels: warm-up 3×3, target 4×4, stretch 5×5)</a:t>
+            </a:r>
+            <a:endParaRPr lang="en-US" sz="1200" dirty="0"/>
+          </a:p>
+          <a:p>
+            <a:pPr algn="l" marL="342900" indent="-342900">
+              <a:lnSpc>
+                <a:spcPts val="1620"/>
+              </a:lnSpc>
+              <a:spcAft>
+                <a:spcPts val="300"/>
+              </a:spcAft>
+              <a:buSzPct val="100000"/>
+              <a:buChar char="•"/>
+            </a:pPr>
+            <a:r>
+              <a:rPr lang="en-US" sz="1200" dirty="0">
+                <a:solidFill>
+                  <a:srgbClr val="1A1A1A"/>
+                </a:solidFill>
+                <a:latin typeface="Georgia" pitchFamily="34" charset="0"/>
+                <a:ea typeface="Georgia" pitchFamily="34" charset="-122"/>
+                <a:cs typeface="Georgia" pitchFamily="34" charset="-120"/>
+              </a:rPr>
+              <a:t>Stopwatch</a:t>
+            </a:r>
+            <a:endParaRPr lang="en-US" sz="1200" dirty="0"/>
+          </a:p>
+          <a:p>
+            <a:pPr algn="l" marL="342900" indent="-342900">
+              <a:lnSpc>
+                <a:spcPts val="1620"/>
+              </a:lnSpc>
+              <a:spcAft>
+                <a:spcPts val="300"/>
+              </a:spcAft>
+              <a:buSzPct val="100000"/>
+              <a:buChar char="•"/>
+            </a:pPr>
+            <a:r>
+              <a:rPr lang="en-US" sz="1200" dirty="0">
+                <a:solidFill>
+                  <a:srgbClr val="1A1A1A"/>
+                </a:solidFill>
+                <a:latin typeface="Georgia" pitchFamily="34" charset="0"/>
+                <a:ea typeface="Georgia" pitchFamily="34" charset="-122"/>
+                <a:cs typeface="Georgia" pitchFamily="34" charset="-120"/>
+              </a:rPr>
+              <a:t>Whiteboard</a:t>
+            </a:r>
+            <a:endParaRPr lang="en-US" sz="1200" dirty="0"/>
+          </a:p>
+        </p:txBody>
+      </p:sp>
+      <p:sp>
+        <p:nvSpPr>
+          <p:cNvPr id="5" name="Text 3"/>
           <p:cNvSpPr/>
           <p:nvPr/>
         </p:nvSpPr>
@@ -2391,7 +3352,7 @@
                 <a:ea typeface="Times New Roman" pitchFamily="34" charset="-122"/>
                 <a:cs typeface="Times New Roman" pitchFamily="34" charset="-120"/>
               </a:rPr>
-              <a:t>Warm-up (5 min)</a:t>
+              <a:t>Flow</a:t>
             </a:r>
             <a:endParaRPr lang="en-US" sz="1800" dirty="0"/>
           </a:p>
@@ -2400,54 +3361,6 @@
       <p:sp>
         <p:nvSpPr>
           <p:cNvPr id="4" name="Text 2"/>
-          <p:cNvSpPr/>
-          <p:nvPr/>
-        </p:nvSpPr>
-        <p:spPr>
-          <a:xfrm>
-            <a:off x="406301" y="870942"/>
-            <a:ext cx="8498026" cy="213271"/>
-          </a:xfrm>
-          <a:prstGeom prst="rect">
-            <a:avLst/>
-          </a:prstGeom>
-          <a:noFill/>
-          <a:ln/>
-        </p:spPr>
-        <p:txBody>
-          <a:bodyPr wrap="square" lIns="0" tIns="0" rIns="0" bIns="0" rtlCol="0" anchor="t"/>
-          <a:lstStyle/>
-          <a:p>
-            <a:pPr algn="l" indent="0" marL="0">
-              <a:lnSpc>
-                <a:spcPts val="1680"/>
-              </a:lnSpc>
-              <a:spcBef>
-                <a:spcPts val="300"/>
-              </a:spcBef>
-              <a:spcAft>
-                <a:spcPts val="300"/>
-              </a:spcAft>
-              <a:buNone/>
-            </a:pPr>
-            <a:r>
-              <a:rPr lang="en-US" sz="1200" dirty="0">
-                <a:solidFill>
-                  <a:srgbClr val="1A1A1A"/>
-                </a:solidFill>
-                <a:latin typeface="Georgia" pitchFamily="34" charset="0"/>
-                <a:ea typeface="Georgia" pitchFamily="34" charset="-122"/>
-                <a:cs typeface="Georgia" pitchFamily="34" charset="-120"/>
-              </a:rPr>
-              <a:t>– Quick make-10 chorus (should be automatic). – Recall: dot procedure (scan, dot on completion to 10, count dots as carry).</a:t>
-            </a:r>
-            <a:endParaRPr lang="en-US" sz="1200" dirty="0"/>
-          </a:p>
-        </p:txBody>
-      </p:sp>
-      <p:sp>
-        <p:nvSpPr>
-          <p:cNvPr id="5" name="Text 3"/>
           <p:cNvSpPr/>
           <p:nvPr/>
         </p:nvSpPr>
@@ -2597,7 +3510,7 @@
                 <a:ea typeface="Times New Roman" pitchFamily="34" charset="-122"/>
                 <a:cs typeface="Times New Roman" pitchFamily="34" charset="-120"/>
               </a:rPr>
-              <a:t>Drill (20 min)</a:t>
+              <a:t>Warm-up (5 min)</a:t>
             </a:r>
             <a:endParaRPr lang="en-US" sz="1800" dirty="0"/>
           </a:p>
@@ -2611,8 +3524,8 @@
         </p:nvSpPr>
         <p:spPr>
           <a:xfrm>
-            <a:off x="406301" y="870942"/>
-            <a:ext cx="8498026" cy="213271"/>
+            <a:off x="634901" y="883593"/>
+            <a:ext cx="8102798" cy="525661"/>
           </a:xfrm>
           <a:prstGeom prst="rect">
             <a:avLst/>
@@ -2624,17 +3537,15 @@
           <a:bodyPr wrap="square" lIns="0" tIns="0" rIns="0" bIns="0" rtlCol="0" anchor="t"/>
           <a:lstStyle/>
           <a:p>
-            <a:pPr algn="l" indent="0" marL="0">
-              <a:lnSpc>
-                <a:spcPts val="1680"/>
-              </a:lnSpc>
-              <a:spcBef>
-                <a:spcPts val="300"/>
-              </a:spcBef>
-              <a:spcAft>
-                <a:spcPts val="300"/>
-              </a:spcAft>
-              <a:buNone/>
+            <a:pPr algn="l" marL="342900" indent="-342900">
+              <a:lnSpc>
+                <a:spcPts val="1620"/>
+              </a:lnSpc>
+              <a:spcAft>
+                <a:spcPts val="300"/>
+              </a:spcAft>
+              <a:buSzPct val="100000"/>
+              <a:buChar char="•"/>
             </a:pPr>
             <a:r>
               <a:rPr lang="en-US" sz="1200" dirty="0">
@@ -2645,32 +3556,10 @@
                 <a:ea typeface="Georgia" pitchFamily="34" charset="-122"/>
                 <a:cs typeface="Georgia" pitchFamily="34" charset="-120"/>
               </a:rPr>
-              <a:t>Three rounds, increasing difficulty:</a:t>
+              <a:t>Quick make-10 chorus (should be automatic).</a:t>
             </a:r>
             <a:endParaRPr lang="en-US" sz="1200" dirty="0"/>
           </a:p>
-        </p:txBody>
-      </p:sp>
-      <p:sp>
-        <p:nvSpPr>
-          <p:cNvPr id="5" name="Text 3"/>
-          <p:cNvSpPr/>
-          <p:nvPr/>
-        </p:nvSpPr>
-        <p:spPr>
-          <a:xfrm>
-            <a:off x="634901" y="1173063"/>
-            <a:ext cx="8102798" cy="769441"/>
-          </a:xfrm>
-          <a:prstGeom prst="rect">
-            <a:avLst/>
-          </a:prstGeom>
-          <a:noFill/>
-          <a:ln/>
-        </p:spPr>
-        <p:txBody>
-          <a:bodyPr wrap="square" lIns="0" tIns="0" rIns="0" bIns="0" rtlCol="0" anchor="t"/>
-          <a:lstStyle/>
           <a:p>
             <a:pPr algn="l" marL="342900" indent="-342900">
               <a:lnSpc>
@@ -2683,7 +3572,7 @@
               <a:buChar char="•"/>
             </a:pPr>
             <a:r>
-              <a:rPr lang="en-US" sz="1200" b="1" dirty="0">
+              <a:rPr lang="en-US" sz="1200" dirty="0">
                 <a:solidFill>
                   <a:srgbClr val="1A1A1A"/>
                 </a:solidFill>
@@ -2691,171 +3580,15 @@
                 <a:ea typeface="Georgia" pitchFamily="34" charset="-122"/>
                 <a:cs typeface="Georgia" pitchFamily="34" charset="-120"/>
               </a:rPr>
-              <a:t>Round 1 (5 min):</a:t>
-            </a:r>
-            <a:pPr algn="l" indent="0" marL="0">
-              <a:lnSpc>
-                <a:spcPts val="1620"/>
-              </a:lnSpc>
-              <a:spcAft>
-                <a:spcPts val="300"/>
-              </a:spcAft>
-              <a:buNone/>
-            </a:pPr>
-            <a:r>
-              <a:rPr lang="en-US" sz="1200" dirty="0">
-                <a:solidFill>
-                  <a:srgbClr val="1A1A1A"/>
-                </a:solidFill>
-                <a:latin typeface="Georgia" pitchFamily="34" charset="0"/>
-                <a:ea typeface="Georgia" pitchFamily="34" charset="-122"/>
-                <a:cs typeface="Georgia" pitchFamily="34" charset="-120"/>
-              </a:rPr>
-              <a:t> 5 × 3-addend × 3-digit sums. Self-timed.</a:t>
+              <a:t>Recall: dot procedure (scan, dot on completion to 10, count dots as carry).</a:t>
             </a:r>
             <a:endParaRPr lang="en-US" sz="1200" dirty="0"/>
           </a:p>
-          <a:p>
-            <a:pPr algn="l" marL="342900" indent="-342900">
-              <a:lnSpc>
-                <a:spcPts val="1620"/>
-              </a:lnSpc>
-              <a:spcAft>
-                <a:spcPts val="300"/>
-              </a:spcAft>
-              <a:buSzPct val="100000"/>
-              <a:buChar char="•"/>
-            </a:pPr>
-            <a:r>
-              <a:rPr lang="en-US" sz="1200" b="1" dirty="0">
-                <a:solidFill>
-                  <a:srgbClr val="1A1A1A"/>
-                </a:solidFill>
-                <a:latin typeface="Georgia" pitchFamily="34" charset="0"/>
-                <a:ea typeface="Georgia" pitchFamily="34" charset="-122"/>
-                <a:cs typeface="Georgia" pitchFamily="34" charset="-120"/>
-              </a:rPr>
-              <a:t>Round 2 (8 min):</a:t>
-            </a:r>
-            <a:pPr algn="l" indent="0" marL="0">
-              <a:lnSpc>
-                <a:spcPts val="1620"/>
-              </a:lnSpc>
-              <a:spcAft>
-                <a:spcPts val="300"/>
-              </a:spcAft>
-              <a:buNone/>
-            </a:pPr>
-            <a:r>
-              <a:rPr lang="en-US" sz="1200" dirty="0">
-                <a:solidFill>
-                  <a:srgbClr val="1A1A1A"/>
-                </a:solidFill>
-                <a:latin typeface="Georgia" pitchFamily="34" charset="0"/>
-                <a:ea typeface="Georgia" pitchFamily="34" charset="-122"/>
-                <a:cs typeface="Georgia" pitchFamily="34" charset="-120"/>
-              </a:rPr>
-              <a:t> 5 × 4-addend × 4-digit sums. Self-timed.</a:t>
-            </a:r>
-            <a:endParaRPr lang="en-US" sz="1200" dirty="0"/>
-          </a:p>
-          <a:p>
-            <a:pPr algn="l" marL="342900" indent="-342900">
-              <a:lnSpc>
-                <a:spcPts val="1620"/>
-              </a:lnSpc>
-              <a:spcAft>
-                <a:spcPts val="300"/>
-              </a:spcAft>
-              <a:buSzPct val="100000"/>
-              <a:buChar char="•"/>
-            </a:pPr>
-            <a:r>
-              <a:rPr lang="en-US" sz="1200" b="1" dirty="0">
-                <a:solidFill>
-                  <a:srgbClr val="1A1A1A"/>
-                </a:solidFill>
-                <a:latin typeface="Georgia" pitchFamily="34" charset="0"/>
-                <a:ea typeface="Georgia" pitchFamily="34" charset="-122"/>
-                <a:cs typeface="Georgia" pitchFamily="34" charset="-120"/>
-              </a:rPr>
-              <a:t>Round 3 (7 min):</a:t>
-            </a:r>
-            <a:pPr algn="l" indent="0" marL="0">
-              <a:lnSpc>
-                <a:spcPts val="1620"/>
-              </a:lnSpc>
-              <a:spcAft>
-                <a:spcPts val="300"/>
-              </a:spcAft>
-              <a:buNone/>
-            </a:pPr>
-            <a:r>
-              <a:rPr lang="en-US" sz="1200" dirty="0">
-                <a:solidFill>
-                  <a:srgbClr val="1A1A1A"/>
-                </a:solidFill>
-                <a:latin typeface="Georgia" pitchFamily="34" charset="0"/>
-                <a:ea typeface="Georgia" pitchFamily="34" charset="-122"/>
-                <a:cs typeface="Georgia" pitchFamily="34" charset="-120"/>
-              </a:rPr>
-              <a:t> 3 × 5-addend × 5-digit sums. Self-timed.</a:t>
-            </a:r>
-            <a:endParaRPr lang="en-US" sz="1200" dirty="0"/>
-          </a:p>
-        </p:txBody>
-      </p:sp>
-      <p:sp>
-        <p:nvSpPr>
-          <p:cNvPr id="6" name="Text 4"/>
-          <p:cNvSpPr/>
-          <p:nvPr/>
-        </p:nvSpPr>
-        <p:spPr>
-          <a:xfrm>
-            <a:off x="406301" y="2031355"/>
-            <a:ext cx="8498026" cy="213271"/>
-          </a:xfrm>
-          <a:prstGeom prst="rect">
-            <a:avLst/>
-          </a:prstGeom>
-          <a:noFill/>
-          <a:ln/>
-        </p:spPr>
-        <p:txBody>
-          <a:bodyPr wrap="square" lIns="0" tIns="0" rIns="0" bIns="0" rtlCol="0" anchor="t"/>
-          <a:lstStyle/>
-          <a:p>
-            <a:pPr algn="l" indent="0" marL="0">
-              <a:lnSpc>
-                <a:spcPts val="1680"/>
-              </a:lnSpc>
-              <a:spcBef>
-                <a:spcPts val="300"/>
-              </a:spcBef>
-              <a:spcAft>
-                <a:spcPts val="300"/>
-              </a:spcAft>
-              <a:buNone/>
-            </a:pPr>
-            <a:r>
-              <a:rPr lang="en-US" sz="1200" dirty="0">
-                <a:solidFill>
-                  <a:srgbClr val="1A1A1A"/>
-                </a:solidFill>
-                <a:latin typeface="Georgia" pitchFamily="34" charset="0"/>
-                <a:ea typeface="Georgia" pitchFamily="34" charset="-122"/>
-                <a:cs typeface="Georgia" pitchFamily="34" charset="-120"/>
-              </a:rPr>
-              <a:t>Record times for Round 3 — compare to Day 5's retest target.</a:t>
-            </a:r>
-            <a:endParaRPr lang="en-US" sz="1200" dirty="0"/>
-          </a:p>
-        </p:txBody>
-      </p:sp>
-      <p:sp>
-        <p:nvSpPr>
-          <p:cNvPr id="7" name="Text 5"/>
+        </p:txBody>
+      </p:sp>
+      <p:sp>
+        <p:nvSpPr>
+          <p:cNvPr id="5" name="Text 3"/>
           <p:cNvSpPr/>
           <p:nvPr/>
         </p:nvSpPr>
@@ -3005,7 +3738,7 @@
                 <a:ea typeface="Times New Roman" pitchFamily="34" charset="-122"/>
                 <a:cs typeface="Times New Roman" pitchFamily="34" charset="-120"/>
               </a:rPr>
-              <a:t>Wrap-up (5 min)</a:t>
+              <a:t>Core (15 min) — Procedure refinement at speed</a:t>
             </a:r>
             <a:endParaRPr lang="en-US" sz="1800" dirty="0"/>
           </a:p>
@@ -3019,8 +3752,8 @@
         </p:nvSpPr>
         <p:spPr>
           <a:xfrm>
-            <a:off x="406301" y="870942"/>
-            <a:ext cx="8498026" cy="426541"/>
+            <a:off x="634901" y="883593"/>
+            <a:ext cx="8102798" cy="525661"/>
           </a:xfrm>
           <a:prstGeom prst="rect">
             <a:avLst/>
@@ -3032,17 +3765,15 @@
           <a:bodyPr wrap="square" lIns="0" tIns="0" rIns="0" bIns="0" rtlCol="0" anchor="t"/>
           <a:lstStyle/>
           <a:p>
-            <a:pPr algn="l" indent="0" marL="0">
-              <a:lnSpc>
-                <a:spcPts val="1680"/>
-              </a:lnSpc>
-              <a:spcBef>
-                <a:spcPts val="300"/>
-              </a:spcBef>
-              <a:spcAft>
-                <a:spcPts val="300"/>
-              </a:spcAft>
-              <a:buNone/>
+            <a:pPr algn="l" marL="342900" indent="-342900">
+              <a:lnSpc>
+                <a:spcPts val="1620"/>
+              </a:lnSpc>
+              <a:spcAft>
+                <a:spcPts val="300"/>
+              </a:spcAft>
+              <a:buSzPct val="100000"/>
+              <a:buChar char="•"/>
             </a:pPr>
             <a:r>
               <a:rPr lang="en-US" sz="1200" dirty="0">
@@ -3053,22 +3784,23 @@
                 <a:ea typeface="Georgia" pitchFamily="34" charset="-122"/>
                 <a:cs typeface="Georgia" pitchFamily="34" charset="-120"/>
               </a:rPr>
-              <a:t>– Show of hands by Round 3 average time: &lt;60 sec / 60–90 sec / 90+ sec. – Preview Day 4: </a:t>
-            </a:r>
-            <a:pPr algn="l" indent="0" marL="0">
-              <a:lnSpc>
-                <a:spcPts val="1680"/>
-              </a:lnSpc>
-              <a:spcBef>
-                <a:spcPts val="300"/>
-              </a:spcBef>
-              <a:spcAft>
-                <a:spcPts val="300"/>
-              </a:spcAft>
-              <a:buNone/>
-            </a:pPr>
-            <a:r>
-              <a:rPr lang="en-US" sz="1200" i="1" dirty="0">
+              <a:t>Demo on board: a 5×5 problem. Solve at speed (45 sec target).</a:t>
+            </a:r>
+            <a:endParaRPr lang="en-US" sz="1200" dirty="0"/>
+          </a:p>
+          <a:p>
+            <a:pPr algn="l" marL="342900" indent="-342900">
+              <a:lnSpc>
+                <a:spcPts val="1620"/>
+              </a:lnSpc>
+              <a:spcAft>
+                <a:spcPts val="300"/>
+              </a:spcAft>
+              <a:buSzPct val="100000"/>
+              <a:buChar char="•"/>
+            </a:pPr>
+            <a:r>
+              <a:rPr lang="en-US" sz="1200" dirty="0">
                 <a:solidFill>
                   <a:srgbClr val="1A1A1A"/>
                 </a:solidFill>
@@ -3076,7 +3808,7 @@
                 <a:ea typeface="Georgia" pitchFamily="34" charset="-122"/>
                 <a:cs typeface="Georgia" pitchFamily="34" charset="-120"/>
               </a:rPr>
-              <a:t>"Tomorrow — Sankalana Vyavakalanābhyām and Pūraṇāpūraṇābhyām with worked examples beyond just addition."</a:t>
+              <a:t>Identify three skills that distinguish speed-users from slow-users:</a:t>
             </a:r>
             <a:endParaRPr lang="en-US" sz="1200" dirty="0"/>
           </a:p>
@@ -3085,6 +3817,160 @@
       <p:sp>
         <p:nvSpPr>
           <p:cNvPr id="5" name="Text 3"/>
+          <p:cNvSpPr/>
+          <p:nvPr/>
+        </p:nvSpPr>
+        <p:spPr>
+          <a:xfrm>
+            <a:off x="634901" y="1510754"/>
+            <a:ext cx="8102798" cy="769441"/>
+          </a:xfrm>
+          <a:prstGeom prst="rect">
+            <a:avLst/>
+          </a:prstGeom>
+          <a:noFill/>
+          <a:ln/>
+        </p:spPr>
+        <p:txBody>
+          <a:bodyPr wrap="square" lIns="0" tIns="0" rIns="0" bIns="0" rtlCol="0" anchor="t"/>
+          <a:lstStyle/>
+          <a:p>
+            <a:pPr algn="l" marL="342900" indent="-342900">
+              <a:lnSpc>
+                <a:spcPts val="1620"/>
+              </a:lnSpc>
+              <a:spcAft>
+                <a:spcPts val="300"/>
+              </a:spcAft>
+              <a:buSzPct val="100000"/>
+              <a:buChar char="•"/>
+            </a:pPr>
+            <a:r>
+              <a:rPr lang="en-US" sz="1200" b="1" dirty="0">
+                <a:solidFill>
+                  <a:srgbClr val="1A1A1A"/>
+                </a:solidFill>
+                <a:latin typeface="Georgia" pitchFamily="34" charset="0"/>
+                <a:ea typeface="Georgia" pitchFamily="34" charset="-122"/>
+                <a:cs typeface="Georgia" pitchFamily="34" charset="-120"/>
+              </a:rPr>
+              <a:t>Eye scan pattern</a:t>
+            </a:r>
+            <a:pPr algn="l" indent="0" marL="0">
+              <a:lnSpc>
+                <a:spcPts val="1620"/>
+              </a:lnSpc>
+              <a:spcAft>
+                <a:spcPts val="300"/>
+              </a:spcAft>
+              <a:buNone/>
+            </a:pPr>
+            <a:r>
+              <a:rPr lang="en-US" sz="1200" dirty="0">
+                <a:solidFill>
+                  <a:srgbClr val="1A1A1A"/>
+                </a:solidFill>
+                <a:latin typeface="Georgia" pitchFamily="34" charset="0"/>
+                <a:ea typeface="Georgia" pitchFamily="34" charset="-122"/>
+                <a:cs typeface="Georgia" pitchFamily="34" charset="-120"/>
+              </a:rPr>
+              <a:t> — top-to-bottom, then jump to next-in-column-that-completes (rather than always one-at-a-time).</a:t>
+            </a:r>
+            <a:endParaRPr lang="en-US" sz="1200" dirty="0"/>
+          </a:p>
+          <a:p>
+            <a:pPr algn="l" marL="342900" indent="-342900">
+              <a:lnSpc>
+                <a:spcPts val="1620"/>
+              </a:lnSpc>
+              <a:spcAft>
+                <a:spcPts val="300"/>
+              </a:spcAft>
+              <a:buSzPct val="100000"/>
+              <a:buChar char="•"/>
+            </a:pPr>
+            <a:r>
+              <a:rPr lang="en-US" sz="1200" b="1" dirty="0">
+                <a:solidFill>
+                  <a:srgbClr val="1A1A1A"/>
+                </a:solidFill>
+                <a:latin typeface="Georgia" pitchFamily="34" charset="0"/>
+                <a:ea typeface="Georgia" pitchFamily="34" charset="-122"/>
+                <a:cs typeface="Georgia" pitchFamily="34" charset="-120"/>
+              </a:rPr>
+              <a:t>Mental running total</a:t>
+            </a:r>
+            <a:pPr algn="l" indent="0" marL="0">
+              <a:lnSpc>
+                <a:spcPts val="1620"/>
+              </a:lnSpc>
+              <a:spcAft>
+                <a:spcPts val="300"/>
+              </a:spcAft>
+              <a:buNone/>
+            </a:pPr>
+            <a:r>
+              <a:rPr lang="en-US" sz="1200" dirty="0">
+                <a:solidFill>
+                  <a:srgbClr val="1A1A1A"/>
+                </a:solidFill>
+                <a:latin typeface="Georgia" pitchFamily="34" charset="0"/>
+                <a:ea typeface="Georgia" pitchFamily="34" charset="-122"/>
+                <a:cs typeface="Georgia" pitchFamily="34" charset="-120"/>
+              </a:rPr>
+              <a:t> — keep it in your head; don't recompute.</a:t>
+            </a:r>
+            <a:endParaRPr lang="en-US" sz="1200" dirty="0"/>
+          </a:p>
+          <a:p>
+            <a:pPr algn="l" marL="342900" indent="-342900">
+              <a:lnSpc>
+                <a:spcPts val="1620"/>
+              </a:lnSpc>
+              <a:spcAft>
+                <a:spcPts val="300"/>
+              </a:spcAft>
+              <a:buSzPct val="100000"/>
+              <a:buChar char="•"/>
+            </a:pPr>
+            <a:r>
+              <a:rPr lang="en-US" sz="1200" b="1" dirty="0">
+                <a:solidFill>
+                  <a:srgbClr val="1A1A1A"/>
+                </a:solidFill>
+                <a:latin typeface="Georgia" pitchFamily="34" charset="0"/>
+                <a:ea typeface="Georgia" pitchFamily="34" charset="-122"/>
+                <a:cs typeface="Georgia" pitchFamily="34" charset="-120"/>
+              </a:rPr>
+              <a:t>Carry insertion</a:t>
+            </a:r>
+            <a:pPr algn="l" indent="0" marL="0">
+              <a:lnSpc>
+                <a:spcPts val="1620"/>
+              </a:lnSpc>
+              <a:spcAft>
+                <a:spcPts val="300"/>
+              </a:spcAft>
+              <a:buNone/>
+            </a:pPr>
+            <a:r>
+              <a:rPr lang="en-US" sz="1200" dirty="0">
+                <a:solidFill>
+                  <a:srgbClr val="1A1A1A"/>
+                </a:solidFill>
+                <a:latin typeface="Georgia" pitchFamily="34" charset="0"/>
+                <a:ea typeface="Georgia" pitchFamily="34" charset="-122"/>
+                <a:cs typeface="Georgia" pitchFamily="34" charset="-120"/>
+              </a:rPr>
+              <a:t> — write the carry as a tiny digit AT THE TOP of the next column before starting that column.</a:t>
+            </a:r>
+            <a:endParaRPr lang="en-US" sz="1200" dirty="0"/>
+          </a:p>
+        </p:txBody>
+      </p:sp>
+      <p:sp>
+        <p:nvSpPr>
+          <p:cNvPr id="6" name="Text 4"/>
           <p:cNvSpPr/>
           <p:nvPr/>
         </p:nvSpPr>
@@ -3234,7 +4120,7 @@
                 <a:ea typeface="Times New Roman" pitchFamily="34" charset="-122"/>
                 <a:cs typeface="Times New Roman" pitchFamily="34" charset="-120"/>
               </a:rPr>
-              <a:t>Differentiation</a:t>
+              <a:t>Core (15 min) — Procedure refinement at speed (cont.)</a:t>
             </a:r>
             <a:endParaRPr lang="en-US" sz="1800" dirty="0"/>
           </a:p>
@@ -3249,7 +4135,7 @@
         <p:spPr>
           <a:xfrm>
             <a:off x="634901" y="883593"/>
-            <a:ext cx="8102798" cy="525661"/>
+            <a:ext cx="8102798" cy="281880"/>
           </a:xfrm>
           <a:prstGeom prst="rect">
             <a:avLst/>
@@ -3272,7 +4158,7 @@
               <a:buChar char="•"/>
             </a:pPr>
             <a:r>
-              <a:rPr lang="en-US" sz="1200" b="1" dirty="0">
+              <a:rPr lang="en-US" sz="1200" dirty="0">
                 <a:solidFill>
                   <a:srgbClr val="1A1A1A"/>
                 </a:solidFill>
@@ -3280,71 +4166,7 @@
                 <a:ea typeface="Georgia" pitchFamily="34" charset="-122"/>
                 <a:cs typeface="Georgia" pitchFamily="34" charset="-120"/>
               </a:rPr>
-              <a:t>Tier up:</a:t>
-            </a:r>
-            <a:pPr algn="l" indent="0" marL="0">
-              <a:lnSpc>
-                <a:spcPts val="1620"/>
-              </a:lnSpc>
-              <a:spcAft>
-                <a:spcPts val="300"/>
-              </a:spcAft>
-              <a:buNone/>
-            </a:pPr>
-            <a:r>
-              <a:rPr lang="en-US" sz="1200" dirty="0">
-                <a:solidFill>
-                  <a:srgbClr val="1A1A1A"/>
-                </a:solidFill>
-                <a:latin typeface="Georgia" pitchFamily="34" charset="0"/>
-                <a:ea typeface="Georgia" pitchFamily="34" charset="-122"/>
-                <a:cs typeface="Georgia" pitchFamily="34" charset="-120"/>
-              </a:rPr>
-              <a:t> Try 6-addend × 6-digit. Time-target: under 120 sec.</a:t>
-            </a:r>
-            <a:endParaRPr lang="en-US" sz="1200" dirty="0"/>
-          </a:p>
-          <a:p>
-            <a:pPr algn="l" marL="342900" indent="-342900">
-              <a:lnSpc>
-                <a:spcPts val="1620"/>
-              </a:lnSpc>
-              <a:spcAft>
-                <a:spcPts val="300"/>
-              </a:spcAft>
-              <a:buSzPct val="100000"/>
-              <a:buChar char="•"/>
-            </a:pPr>
-            <a:r>
-              <a:rPr lang="en-US" sz="1200" b="1" dirty="0">
-                <a:solidFill>
-                  <a:srgbClr val="1A1A1A"/>
-                </a:solidFill>
-                <a:latin typeface="Georgia" pitchFamily="34" charset="0"/>
-                <a:ea typeface="Georgia" pitchFamily="34" charset="-122"/>
-                <a:cs typeface="Georgia" pitchFamily="34" charset="-120"/>
-              </a:rPr>
-              <a:t>Tier down:</a:t>
-            </a:r>
-            <a:pPr algn="l" indent="0" marL="0">
-              <a:lnSpc>
-                <a:spcPts val="1620"/>
-              </a:lnSpc>
-              <a:spcAft>
-                <a:spcPts val="300"/>
-              </a:spcAft>
-              <a:buNone/>
-            </a:pPr>
-            <a:r>
-              <a:rPr lang="en-US" sz="1200" dirty="0">
-                <a:solidFill>
-                  <a:srgbClr val="1A1A1A"/>
-                </a:solidFill>
-                <a:latin typeface="Georgia" pitchFamily="34" charset="0"/>
-                <a:ea typeface="Georgia" pitchFamily="34" charset="-122"/>
-                <a:cs typeface="Georgia" pitchFamily="34" charset="-120"/>
-              </a:rPr>
-              <a:t> Stay at Round 2 level until comfortable.</a:t>
+              <a:t>Worked example with these three skills called out explicitly.</a:t>
             </a:r>
             <a:endParaRPr lang="en-US" sz="1200" dirty="0"/>
           </a:p>
@@ -3502,7 +4324,7 @@
                 <a:ea typeface="Times New Roman" pitchFamily="34" charset="-122"/>
                 <a:cs typeface="Times New Roman" pitchFamily="34" charset="-120"/>
               </a:rPr>
-              <a:t>Teacher notes</a:t>
+              <a:t>Drill (20 min)</a:t>
             </a:r>
             <a:endParaRPr lang="en-US" sz="1800" dirty="0"/>
           </a:p>
@@ -3517,7 +4339,7 @@
         <p:spPr>
           <a:xfrm>
             <a:off x="406301" y="870942"/>
-            <a:ext cx="8498026" cy="426541"/>
+            <a:ext cx="8498026" cy="213271"/>
           </a:xfrm>
           <a:prstGeom prst="rect">
             <a:avLst/>
@@ -3550,7 +4372,7 @@
                 <a:ea typeface="Georgia" pitchFamily="34" charset="-122"/>
                 <a:cs typeface="Georgia" pitchFamily="34" charset="-120"/>
               </a:rPr>
-              <a:t>– The "eye scan pattern" is the speed multiplier. Most students serial-scan. Teach the jump-pattern: see one completion, mark it, scan rest of column for the NEXT one without restarting.</a:t>
+              <a:t>Three rounds, increasing difficulty:</a:t>
             </a:r>
             <a:endParaRPr lang="en-US" sz="1200" dirty="0"/>
           </a:p>
@@ -3559,6 +4381,208 @@
       <p:sp>
         <p:nvSpPr>
           <p:cNvPr id="5" name="Text 3"/>
+          <p:cNvSpPr/>
+          <p:nvPr/>
+        </p:nvSpPr>
+        <p:spPr>
+          <a:xfrm>
+            <a:off x="634901" y="1173063"/>
+            <a:ext cx="8102798" cy="769441"/>
+          </a:xfrm>
+          <a:prstGeom prst="rect">
+            <a:avLst/>
+          </a:prstGeom>
+          <a:noFill/>
+          <a:ln/>
+        </p:spPr>
+        <p:txBody>
+          <a:bodyPr wrap="square" lIns="0" tIns="0" rIns="0" bIns="0" rtlCol="0" anchor="t"/>
+          <a:lstStyle/>
+          <a:p>
+            <a:pPr algn="l" marL="342900" indent="-342900">
+              <a:lnSpc>
+                <a:spcPts val="1620"/>
+              </a:lnSpc>
+              <a:spcAft>
+                <a:spcPts val="300"/>
+              </a:spcAft>
+              <a:buSzPct val="100000"/>
+              <a:buChar char="•"/>
+            </a:pPr>
+            <a:r>
+              <a:rPr lang="en-US" sz="1200" b="1" dirty="0">
+                <a:solidFill>
+                  <a:srgbClr val="1A1A1A"/>
+                </a:solidFill>
+                <a:latin typeface="Georgia" pitchFamily="34" charset="0"/>
+                <a:ea typeface="Georgia" pitchFamily="34" charset="-122"/>
+                <a:cs typeface="Georgia" pitchFamily="34" charset="-120"/>
+              </a:rPr>
+              <a:t>Round 1 (5 min):</a:t>
+            </a:r>
+            <a:pPr algn="l" indent="0" marL="0">
+              <a:lnSpc>
+                <a:spcPts val="1620"/>
+              </a:lnSpc>
+              <a:spcAft>
+                <a:spcPts val="300"/>
+              </a:spcAft>
+              <a:buNone/>
+            </a:pPr>
+            <a:r>
+              <a:rPr lang="en-US" sz="1200" dirty="0">
+                <a:solidFill>
+                  <a:srgbClr val="1A1A1A"/>
+                </a:solidFill>
+                <a:latin typeface="Georgia" pitchFamily="34" charset="0"/>
+                <a:ea typeface="Georgia" pitchFamily="34" charset="-122"/>
+                <a:cs typeface="Georgia" pitchFamily="34" charset="-120"/>
+              </a:rPr>
+              <a:t> 5 × 3-addend × 3-digit sums. Self-timed.</a:t>
+            </a:r>
+            <a:endParaRPr lang="en-US" sz="1200" dirty="0"/>
+          </a:p>
+          <a:p>
+            <a:pPr algn="l" marL="342900" indent="-342900">
+              <a:lnSpc>
+                <a:spcPts val="1620"/>
+              </a:lnSpc>
+              <a:spcAft>
+                <a:spcPts val="300"/>
+              </a:spcAft>
+              <a:buSzPct val="100000"/>
+              <a:buChar char="•"/>
+            </a:pPr>
+            <a:r>
+              <a:rPr lang="en-US" sz="1200" b="1" dirty="0">
+                <a:solidFill>
+                  <a:srgbClr val="1A1A1A"/>
+                </a:solidFill>
+                <a:latin typeface="Georgia" pitchFamily="34" charset="0"/>
+                <a:ea typeface="Georgia" pitchFamily="34" charset="-122"/>
+                <a:cs typeface="Georgia" pitchFamily="34" charset="-120"/>
+              </a:rPr>
+              <a:t>Round 2 (8 min):</a:t>
+            </a:r>
+            <a:pPr algn="l" indent="0" marL="0">
+              <a:lnSpc>
+                <a:spcPts val="1620"/>
+              </a:lnSpc>
+              <a:spcAft>
+                <a:spcPts val="300"/>
+              </a:spcAft>
+              <a:buNone/>
+            </a:pPr>
+            <a:r>
+              <a:rPr lang="en-US" sz="1200" dirty="0">
+                <a:solidFill>
+                  <a:srgbClr val="1A1A1A"/>
+                </a:solidFill>
+                <a:latin typeface="Georgia" pitchFamily="34" charset="0"/>
+                <a:ea typeface="Georgia" pitchFamily="34" charset="-122"/>
+                <a:cs typeface="Georgia" pitchFamily="34" charset="-120"/>
+              </a:rPr>
+              <a:t> 5 × 4-addend × 4-digit sums. Self-timed.</a:t>
+            </a:r>
+            <a:endParaRPr lang="en-US" sz="1200" dirty="0"/>
+          </a:p>
+          <a:p>
+            <a:pPr algn="l" marL="342900" indent="-342900">
+              <a:lnSpc>
+                <a:spcPts val="1620"/>
+              </a:lnSpc>
+              <a:spcAft>
+                <a:spcPts val="300"/>
+              </a:spcAft>
+              <a:buSzPct val="100000"/>
+              <a:buChar char="•"/>
+            </a:pPr>
+            <a:r>
+              <a:rPr lang="en-US" sz="1200" b="1" dirty="0">
+                <a:solidFill>
+                  <a:srgbClr val="1A1A1A"/>
+                </a:solidFill>
+                <a:latin typeface="Georgia" pitchFamily="34" charset="0"/>
+                <a:ea typeface="Georgia" pitchFamily="34" charset="-122"/>
+                <a:cs typeface="Georgia" pitchFamily="34" charset="-120"/>
+              </a:rPr>
+              <a:t>Round 3 (7 min):</a:t>
+            </a:r>
+            <a:pPr algn="l" indent="0" marL="0">
+              <a:lnSpc>
+                <a:spcPts val="1620"/>
+              </a:lnSpc>
+              <a:spcAft>
+                <a:spcPts val="300"/>
+              </a:spcAft>
+              <a:buNone/>
+            </a:pPr>
+            <a:r>
+              <a:rPr lang="en-US" sz="1200" dirty="0">
+                <a:solidFill>
+                  <a:srgbClr val="1A1A1A"/>
+                </a:solidFill>
+                <a:latin typeface="Georgia" pitchFamily="34" charset="0"/>
+                <a:ea typeface="Georgia" pitchFamily="34" charset="-122"/>
+                <a:cs typeface="Georgia" pitchFamily="34" charset="-120"/>
+              </a:rPr>
+              <a:t> 3 × 5-addend × 5-digit sums. Self-timed.</a:t>
+            </a:r>
+            <a:endParaRPr lang="en-US" sz="1200" dirty="0"/>
+          </a:p>
+        </p:txBody>
+      </p:sp>
+      <p:sp>
+        <p:nvSpPr>
+          <p:cNvPr id="6" name="Text 4"/>
+          <p:cNvSpPr/>
+          <p:nvPr/>
+        </p:nvSpPr>
+        <p:spPr>
+          <a:xfrm>
+            <a:off x="406301" y="2031355"/>
+            <a:ext cx="8498026" cy="213271"/>
+          </a:xfrm>
+          <a:prstGeom prst="rect">
+            <a:avLst/>
+          </a:prstGeom>
+          <a:noFill/>
+          <a:ln/>
+        </p:spPr>
+        <p:txBody>
+          <a:bodyPr wrap="square" lIns="0" tIns="0" rIns="0" bIns="0" rtlCol="0" anchor="t"/>
+          <a:lstStyle/>
+          <a:p>
+            <a:pPr algn="l" indent="0" marL="0">
+              <a:lnSpc>
+                <a:spcPts val="1680"/>
+              </a:lnSpc>
+              <a:spcBef>
+                <a:spcPts val="300"/>
+              </a:spcBef>
+              <a:spcAft>
+                <a:spcPts val="300"/>
+              </a:spcAft>
+              <a:buNone/>
+            </a:pPr>
+            <a:r>
+              <a:rPr lang="en-US" sz="1200" dirty="0">
+                <a:solidFill>
+                  <a:srgbClr val="1A1A1A"/>
+                </a:solidFill>
+                <a:latin typeface="Georgia" pitchFamily="34" charset="0"/>
+                <a:ea typeface="Georgia" pitchFamily="34" charset="-122"/>
+                <a:cs typeface="Georgia" pitchFamily="34" charset="-120"/>
+              </a:rPr>
+              <a:t>Record times for Round 3 — compare to Day 5's retest target.</a:t>
+            </a:r>
+            <a:endParaRPr lang="en-US" sz="1200" dirty="0"/>
+          </a:p>
+        </p:txBody>
+      </p:sp>
+      <p:sp>
+        <p:nvSpPr>
+          <p:cNvPr id="7" name="Text 5"/>
           <p:cNvSpPr/>
           <p:nvPr/>
         </p:nvSpPr>
@@ -3708,7 +4732,7 @@
                 <a:ea typeface="Times New Roman" pitchFamily="34" charset="-122"/>
                 <a:cs typeface="Times New Roman" pitchFamily="34" charset="-120"/>
               </a:rPr>
-              <a:t>Citation(s) used</a:t>
+              <a:t>Wrap-up (5 min)</a:t>
             </a:r>
             <a:endParaRPr lang="en-US" sz="1800" dirty="0"/>
           </a:p>
@@ -3723,7 +4747,7 @@
         <p:spPr>
           <a:xfrm>
             <a:off x="634901" y="883593"/>
-            <a:ext cx="8102798" cy="281880"/>
+            <a:ext cx="8102798" cy="731341"/>
           </a:xfrm>
           <a:prstGeom prst="rect">
             <a:avLst/>
@@ -3746,7 +4770,7 @@
               <a:buChar char="•"/>
             </a:pPr>
             <a:r>
-              <a:rPr lang="en-US" sz="1200" i="1" dirty="0">
+              <a:rPr lang="en-US" sz="1200" dirty="0">
                 <a:solidFill>
                   <a:srgbClr val="1A1A1A"/>
                 </a:solidFill>
@@ -3754,16 +4778,20 @@
                 <a:ea typeface="Georgia" pitchFamily="34" charset="-122"/>
                 <a:cs typeface="Georgia" pitchFamily="34" charset="-120"/>
               </a:rPr>
-              <a:t>Vedic Mathematics Batch1.pdf</a:t>
-            </a:r>
-            <a:pPr algn="l" indent="0" marL="0">
+              <a:t>Show of hands by Round 3 average time: &lt;60 sec / 60–90 sec / 90+ sec.</a:t>
+            </a:r>
+            <a:endParaRPr lang="en-US" sz="1200" dirty="0"/>
+          </a:p>
+          <a:p>
+            <a:pPr algn="l" marL="342900" indent="-342900">
               <a:lnSpc>
                 <a:spcPts val="1620"/>
               </a:lnSpc>
               <a:spcAft>
                 <a:spcPts val="300"/>
               </a:spcAft>
-              <a:buNone/>
+              <a:buSzPct val="100000"/>
+              <a:buChar char="•"/>
             </a:pPr>
             <a:r>
               <a:rPr lang="en-US" sz="1200" dirty="0">
@@ -3774,7 +4802,27 @@
                 <a:ea typeface="Georgia" pitchFamily="34" charset="-122"/>
                 <a:cs typeface="Georgia" pitchFamily="34" charset="-120"/>
               </a:rPr>
-              <a:t>, §5.4.</a:t>
+              <a:t>Preview Day 4: </a:t>
+            </a:r>
+            <a:pPr algn="l" indent="0" marL="0">
+              <a:lnSpc>
+                <a:spcPts val="1620"/>
+              </a:lnSpc>
+              <a:spcAft>
+                <a:spcPts val="300"/>
+              </a:spcAft>
+              <a:buNone/>
+            </a:pPr>
+            <a:r>
+              <a:rPr lang="en-US" sz="1200" i="1" dirty="0">
+                <a:solidFill>
+                  <a:srgbClr val="1A1A1A"/>
+                </a:solidFill>
+                <a:latin typeface="Georgia" pitchFamily="34" charset="0"/>
+                <a:ea typeface="Georgia" pitchFamily="34" charset="-122"/>
+                <a:cs typeface="Georgia" pitchFamily="34" charset="-120"/>
+              </a:rPr>
+              <a:t>"Tomorrow — Sankalana Vyavakalanābhyām and Pūraṇāpūraṇābhyām with worked examples beyond just addition."</a:t>
             </a:r>
             <a:endParaRPr lang="en-US" sz="1200" dirty="0"/>
           </a:p>
